--- a/らくらく勤怠/specs/相談資料_弁護士社労士.pptx
+++ b/らくらく勤怠/specs/相談資料_弁護士社労士.pptx
@@ -4292,7 +4292,7 @@
                 <a:ea typeface="Calibri" pitchFamily="34" charset="-122"/>
                 <a:cs typeface="Calibri" pitchFamily="34" charset="-120"/>
               </a:rPr>
-              <a:t>一般的な労使トラブル相談が中心の窓口なので、「このコードを見てください」ではなく「割増賃金の計算方法の一般的なルールを確認したい」という制度の一般論として聞くと答えてもらいやすい。</a:t>
+              <a:t>商工会議所・県の窓口は事業者向けなので相談しやすい。「このコードを見てください」ではなく「割増賃金の計算方法の一般的なルールを確認したい」という制度の一般論として聞くと答えてもらいやすい。</a:t>
             </a:r>
             <a:endParaRPr lang="en-US" sz="1300" dirty="0"/>
           </a:p>
@@ -4365,7 +4365,7 @@
                 <a:ea typeface="Calibri" pitchFamily="34" charset="-122"/>
                 <a:cs typeface="Calibri" pitchFamily="34" charset="-120"/>
               </a:rPr>
-              <a:t>愛知県「専門労働相談」</a:t>
+              <a:t>名古屋商工会議所「専門相談」</a:t>
             </a:r>
             <a:endParaRPr lang="en-US" sz="1400" dirty="0"/>
           </a:p>
@@ -4404,7 +4404,7 @@
                 <a:ea typeface="Calibri" pitchFamily="34" charset="-122"/>
                 <a:cs typeface="Calibri" pitchFamily="34" charset="-120"/>
               </a:rPr>
-              <a:t>県委託の社労士による相談。無料・秘密厳守。オンライン対応あり</a:t>
+              <a:t>社労士・弁護士等が揃う。非会員も利用可。無料・秘密厳守</a:t>
             </a:r>
             <a:endParaRPr lang="en-US" sz="1100" dirty="0"/>
           </a:p>
@@ -4465,7 +4465,7 @@
                 <a:ea typeface="Calibri" pitchFamily="34" charset="-122"/>
                 <a:cs typeface="Calibri" pitchFamily="34" charset="-120"/>
               </a:rPr>
-              <a:t>県サイトから予約</a:t>
+              <a:t>052-223-5611</a:t>
             </a:r>
             <a:endParaRPr lang="en-US" sz="1200" dirty="0"/>
           </a:p>
@@ -4538,7 +4538,7 @@
                 <a:ea typeface="Calibri" pitchFamily="34" charset="-122"/>
                 <a:cs typeface="Calibri" pitchFamily="34" charset="-120"/>
               </a:rPr>
-              <a:t>愛知県社会保険労務士会</a:t>
+              <a:t>愛知県「専門労働相談」</a:t>
             </a:r>
             <a:endParaRPr lang="en-US" sz="1400" dirty="0"/>
           </a:p>
@@ -4577,7 +4577,7 @@
                 <a:ea typeface="Calibri" pitchFamily="34" charset="-122"/>
                 <a:cs typeface="Calibri" pitchFamily="34" charset="-120"/>
               </a:rPr>
-              <a:t>フリーダイヤルで電話・訪問相談無料（平日9:00〜17:00）</a:t>
+              <a:t>県委託の社労士による相談。無料・秘密厳守。オンライン対応あり</a:t>
             </a:r>
             <a:endParaRPr lang="en-US" sz="1100" dirty="0"/>
           </a:p>
@@ -4638,6 +4638,179 @@
                 <a:ea typeface="Calibri" pitchFamily="34" charset="-122"/>
                 <a:cs typeface="Calibri" pitchFamily="34" charset="-120"/>
               </a:rPr>
+              <a:t>県サイトから予約</a:t>
+            </a:r>
+            <a:endParaRPr lang="en-US" sz="1200" dirty="0"/>
+          </a:p>
+        </p:txBody>
+      </p:sp>
+      <p:sp>
+        <p:nvSpPr>
+          <p:cNvPr id="17" name="Shape 15"/>
+          <p:cNvSpPr/>
+          <p:nvPr/>
+        </p:nvSpPr>
+        <p:spPr>
+          <a:xfrm>
+            <a:off x="548640" y="3977640"/>
+            <a:ext cx="5394960" cy="1234440"/>
+          </a:xfrm>
+          <a:prstGeom prst="roundRect">
+            <a:avLst>
+              <a:gd name="adj" fmla="val 5926"/>
+            </a:avLst>
+          </a:prstGeom>
+          <a:solidFill>
+            <a:srgbClr val="FFFFFF"/>
+          </a:solidFill>
+          <a:ln w="15875">
+            <a:solidFill>
+              <a:srgbClr val="028090"/>
+            </a:solidFill>
+            <a:prstDash val="solid"/>
+          </a:ln>
+          <a:effectLst>
+            <a:outerShdw sx="100000" sy="100000" kx="0" ky="0" algn="bl" rotWithShape="0" blurRad="76200" dist="25400" dir="5400000">
+              <a:srgbClr val="1E2761">
+                <a:alpha val="12000"/>
+              </a:srgbClr>
+            </a:outerShdw>
+          </a:effectLst>
+        </p:spPr>
+      </p:sp>
+      <p:sp>
+        <p:nvSpPr>
+          <p:cNvPr id="18" name="Text 16"/>
+          <p:cNvSpPr txBox="1"/>
+          <p:nvPr/>
+        </p:nvSpPr>
+        <p:spPr>
+          <a:xfrm>
+            <a:off x="777240" y="4105656"/>
+            <a:ext cx="4937760" cy="320040"/>
+          </a:xfrm>
+          <a:prstGeom prst="rect">
+            <a:avLst/>
+          </a:prstGeom>
+          <a:noFill/>
+          <a:ln/>
+        </p:spPr>
+        <p:txBody>
+          <a:bodyPr wrap="square" lIns="0" tIns="0" rIns="0" bIns="0" rtlCol="0" anchor="t"/>
+          <a:lstStyle/>
+          <a:p>
+            <a:pPr indent="0" marL="0">
+              <a:buNone/>
+            </a:pPr>
+            <a:r>
+              <a:rPr lang="en-US" sz="1400" b="1" dirty="0">
+                <a:solidFill>
+                  <a:srgbClr val="1E2761"/>
+                </a:solidFill>
+                <a:latin typeface="Calibri" pitchFamily="34" charset="0"/>
+                <a:ea typeface="Calibri" pitchFamily="34" charset="-122"/>
+                <a:cs typeface="Calibri" pitchFamily="34" charset="-120"/>
+              </a:rPr>
+              <a:t>愛知県社会保険労務士会（バックアップ）</a:t>
+            </a:r>
+            <a:endParaRPr lang="en-US" sz="1400" dirty="0"/>
+          </a:p>
+        </p:txBody>
+      </p:sp>
+      <p:sp>
+        <p:nvSpPr>
+          <p:cNvPr id="19" name="Text 17"/>
+          <p:cNvSpPr txBox="1"/>
+          <p:nvPr/>
+        </p:nvSpPr>
+        <p:spPr>
+          <a:xfrm>
+            <a:off x="777240" y="4453128"/>
+            <a:ext cx="4937760" cy="292608"/>
+          </a:xfrm>
+          <a:prstGeom prst="rect">
+            <a:avLst/>
+          </a:prstGeom>
+          <a:noFill/>
+          <a:ln/>
+        </p:spPr>
+        <p:txBody>
+          <a:bodyPr wrap="square" lIns="0" tIns="0" rIns="0" bIns="0" rtlCol="0" anchor="t"/>
+          <a:lstStyle/>
+          <a:p>
+            <a:pPr indent="0" marL="0">
+              <a:buNone/>
+            </a:pPr>
+            <a:r>
+              <a:rPr lang="en-US" sz="1100" dirty="0">
+                <a:solidFill>
+                  <a:srgbClr val="5B6B8C"/>
+                </a:solidFill>
+                <a:latin typeface="Calibri" pitchFamily="34" charset="0"/>
+                <a:ea typeface="Calibri" pitchFamily="34" charset="-122"/>
+                <a:cs typeface="Calibri" pitchFamily="34" charset="-120"/>
+              </a:rPr>
+              <a:t>フリーダイヤルで電話・訪問相談無料（平日9:00〜17:00）</a:t>
+            </a:r>
+            <a:endParaRPr lang="en-US" sz="1100" dirty="0"/>
+          </a:p>
+        </p:txBody>
+      </p:sp>
+      <p:sp>
+        <p:nvSpPr>
+          <p:cNvPr id="20" name="Shape 18"/>
+          <p:cNvSpPr/>
+          <p:nvPr/>
+        </p:nvSpPr>
+        <p:spPr>
+          <a:xfrm>
+            <a:off x="777240" y="4828032"/>
+            <a:ext cx="1417320" cy="292608"/>
+          </a:xfrm>
+          <a:prstGeom prst="roundRect">
+            <a:avLst>
+              <a:gd name="adj" fmla="val 18750"/>
+            </a:avLst>
+          </a:prstGeom>
+          <a:solidFill>
+            <a:srgbClr val="028090"/>
+          </a:solidFill>
+          <a:ln/>
+        </p:spPr>
+      </p:sp>
+      <p:sp>
+        <p:nvSpPr>
+          <p:cNvPr id="21" name="Text 19"/>
+          <p:cNvSpPr txBox="1"/>
+          <p:nvPr/>
+        </p:nvSpPr>
+        <p:spPr>
+          <a:xfrm>
+            <a:off x="777240" y="4828032"/>
+            <a:ext cx="1417320" cy="292608"/>
+          </a:xfrm>
+          <a:prstGeom prst="rect">
+            <a:avLst/>
+          </a:prstGeom>
+          <a:noFill/>
+          <a:ln/>
+        </p:spPr>
+        <p:txBody>
+          <a:bodyPr wrap="square" lIns="0" tIns="0" rIns="0" bIns="0" rtlCol="0" anchor="ctr"/>
+          <a:lstStyle/>
+          <a:p>
+            <a:pPr algn="ctr" indent="0" marL="0">
+              <a:buNone/>
+            </a:pPr>
+            <a:r>
+              <a:rPr lang="en-US" sz="1200" b="1" dirty="0">
+                <a:solidFill>
+                  <a:srgbClr val="FFFFFF"/>
+                </a:solidFill>
+                <a:latin typeface="Calibri" pitchFamily="34" charset="0"/>
+                <a:ea typeface="Calibri" pitchFamily="34" charset="-122"/>
+                <a:cs typeface="Calibri" pitchFamily="34" charset="-120"/>
+              </a:rPr>
               <a:t>0120-006-802</a:t>
             </a:r>
             <a:endParaRPr lang="en-US" sz="1200" dirty="0"/>
@@ -4646,7 +4819,7 @@
       </p:sp>
       <p:sp>
         <p:nvSpPr>
-          <p:cNvPr id="17" name="Text 15"/>
+          <p:cNvPr id="22" name="Text 20"/>
           <p:cNvSpPr txBox="1"/>
           <p:nvPr/>
         </p:nvSpPr>
@@ -4685,7 +4858,7 @@
       </p:sp>
       <p:sp>
         <p:nvSpPr>
-          <p:cNvPr id="18" name="Text 16"/>
+          <p:cNvPr id="23" name="Text 21"/>
           <p:cNvSpPr txBox="1"/>
           <p:nvPr/>
         </p:nvSpPr>
@@ -8913,7 +9086,7 @@
                 <a:ea typeface="Calibri" pitchFamily="34" charset="-122"/>
                 <a:cs typeface="Calibri" pitchFamily="34" charset="-120"/>
               </a:rPr>
-              <a:t>愛知県弁護士会 名古屋法律相談センター</a:t>
+              <a:t>あいち中小企業法律支援センター</a:t>
             </a:r>
             <a:endParaRPr lang="en-US" sz="1400" dirty="0"/>
           </a:p>
@@ -8952,7 +9125,7 @@
                 <a:ea typeface="Calibri" pitchFamily="34" charset="-122"/>
                 <a:cs typeface="Calibri" pitchFamily="34" charset="-120"/>
               </a:rPr>
-              <a:t>オンライン相談（Web会議「ひまわり」）対応。初回無料枠あり</a:t>
+              <a:t>愛知県弁護士会が運営。中小企業・個人事業主専用。電話相談15分無料</a:t>
             </a:r>
             <a:endParaRPr lang="en-US" sz="1100" dirty="0"/>
           </a:p>
@@ -9013,7 +9186,7 @@
                 <a:ea typeface="Calibri" pitchFamily="34" charset="-122"/>
                 <a:cs typeface="Calibri" pitchFamily="34" charset="-120"/>
               </a:rPr>
-              <a:t>052-565-6110</a:t>
+              <a:t>052-265-6693</a:t>
             </a:r>
             <a:endParaRPr lang="en-US" sz="1200" dirty="0"/>
           </a:p>
@@ -9086,7 +9259,7 @@
                 <a:ea typeface="Calibri" pitchFamily="34" charset="-122"/>
                 <a:cs typeface="Calibri" pitchFamily="34" charset="-120"/>
               </a:rPr>
-              <a:t>あいち労働総合支援フロア</a:t>
+              <a:t>名古屋商工会議所「専門相談」</a:t>
             </a:r>
             <a:endParaRPr lang="en-US" sz="1400" dirty="0"/>
           </a:p>
@@ -9125,7 +9298,7 @@
                 <a:ea typeface="Calibri" pitchFamily="34" charset="-122"/>
                 <a:cs typeface="Calibri" pitchFamily="34" charset="-120"/>
               </a:rPr>
-              <a:t>弁護士・大学教授等によるオンライン(Webex)相談。無料・予約制</a:t>
+              <a:t>弁護士・社労士等が揃う。非会員も利用可。無料・秘密厳守</a:t>
             </a:r>
             <a:endParaRPr lang="en-US" sz="1100" dirty="0"/>
           </a:p>
@@ -9186,7 +9359,7 @@
                 <a:ea typeface="Calibri" pitchFamily="34" charset="-122"/>
                 <a:cs typeface="Calibri" pitchFamily="34" charset="-120"/>
               </a:rPr>
-              <a:t>052-589-1405</a:t>
+              <a:t>052-223-5611</a:t>
             </a:r>
             <a:endParaRPr lang="en-US" sz="1200" dirty="0"/>
           </a:p>
@@ -9259,7 +9432,7 @@
                 <a:ea typeface="Calibri" pitchFamily="34" charset="-122"/>
                 <a:cs typeface="Calibri" pitchFamily="34" charset="-120"/>
               </a:rPr>
-              <a:t>法テラス（愛知）</a:t>
+              <a:t>愛知県弁護士会 名古屋法律相談センター（一般向け・バックアップ）</a:t>
             </a:r>
             <a:endParaRPr lang="en-US" sz="1400" dirty="0"/>
           </a:p>
@@ -9298,7 +9471,7 @@
                 <a:ea typeface="Calibri" pitchFamily="34" charset="-122"/>
                 <a:cs typeface="Calibri" pitchFamily="34" charset="-120"/>
               </a:rPr>
-              <a:t>収入等の条件を満たす場合、無料法律相談が利用できることがある</a:t>
+              <a:t>オンライン相談（Web会議「ひまわり」）対応。初回無料枠あり</a:t>
             </a:r>
             <a:endParaRPr lang="en-US" sz="1100" dirty="0"/>
           </a:p>
@@ -9359,7 +9532,7 @@
                 <a:ea typeface="Calibri" pitchFamily="34" charset="-122"/>
                 <a:cs typeface="Calibri" pitchFamily="34" charset="-120"/>
               </a:rPr>
-              <a:t>houterasu.or.jp</a:t>
+              <a:t>052-565-6110</a:t>
             </a:r>
             <a:endParaRPr lang="en-US" sz="1200" dirty="0"/>
           </a:p>
